--- a/assets/pptx/catalog-34.pptx
+++ b/assets/pptx/catalog-34.pptx
@@ -3755,7 +3755,7 @@
                 <a:ea typeface="Ebrima"/>
                 <a:cs typeface="Ebrima"/>
               </a:rPr>
-              <a:t>አሜን በማለቴ (3X)</a:t>
+              <a:t>አሜን በማለቴ 3X</a:t>
             </a:r>
           </a:p>
           <a:p>
@@ -3791,7 +3791,7 @@
                 <a:ea typeface="Ebrima"/>
                 <a:cs typeface="Ebrima"/>
               </a:rPr>
-              <a:t>አሜን ያልኩት ጌታ (3X)</a:t>
+              <a:t>አሜን ያልኩት ጌታ 3X</a:t>
             </a:r>
           </a:p>
           <a:p>
@@ -3876,7 +3876,7 @@
                 <a:ea typeface="Ebrima"/>
                 <a:cs typeface="Ebrima"/>
               </a:rPr>
-              <a:t>አሜን አሜን (16X)</a:t>
+              <a:t>አሜን አሜን 16X</a:t>
             </a:r>
           </a:p>
         </p:txBody>
@@ -4378,7 +4378,7 @@
                 <a:ea typeface="Ebrima"/>
                 <a:cs typeface="Ebrima"/>
               </a:rPr>
-              <a:t>ኢየሱስዬ ውድዬ (4X)</a:t>
+              <a:t>ኢየሱስዬ ውድዬ 4X</a:t>
             </a:r>
           </a:p>
           <a:p>
